--- a/docs/开题报告.pptx
+++ b/docs/开题报告.pptx
@@ -20032,7 +20032,7 @@
                 </a:solidFill>
                 <a:latin typeface="微软雅黑" panose="020B0503020204020204" charset="-122"/>
               </a:rPr>
-              <a:t>SCOPE BOUNDARY</a:t>
+              <a:t>QUALITY GOALS</a:t>
             </a:r>
             <a:endParaRPr sz="850" b="1" i="0">
               <a:solidFill>
@@ -20086,7 +20086,7 @@
                 </a:solidFill>
                 <a:latin typeface="微软雅黑" panose="020B0503020204020204" charset="-122"/>
               </a:rPr>
-              <a:t>明确不做</a:t>
+              <a:t>关键质量要求</a:t>
             </a:r>
             <a:endParaRPr sz="1900" b="1" i="0">
               <a:solidFill>
@@ -20136,11 +20136,11 @@
             <a:r>
               <a:rPr sz="1500" b="1" i="0">
                 <a:solidFill>
-                  <a:srgbClr val="F2B86A"/>
-                </a:solidFill>
-                <a:latin typeface="微软雅黑" panose="020B0503020204020204" charset="-122"/>
-              </a:rPr>
-              <a:t>×</a:t>
+                  <a:srgbClr val="91DDD5"/>
+                </a:solidFill>
+                <a:latin typeface="微软雅黑" panose="020B0503020204020204" charset="-122"/>
+              </a:rPr>
+              <a:t>✓</a:t>
             </a:r>
             <a:endParaRPr sz="1500" b="1" i="0">
               <a:solidFill>
@@ -20194,7 +20194,7 @@
                 </a:solidFill>
                 <a:latin typeface="微软雅黑" panose="020B0503020204020204" charset="-122"/>
               </a:rPr>
-              <a:t>可直接执行的 G 代码与机床控制</a:t>
+              <a:t>回答绑定文档、页码与原文快照</a:t>
             </a:r>
             <a:endParaRPr sz="1120" b="0" i="0">
               <a:solidFill>
@@ -20244,11 +20244,11 @@
             <a:r>
               <a:rPr sz="1500" b="1" i="0">
                 <a:solidFill>
-                  <a:srgbClr val="F2B86A"/>
-                </a:solidFill>
-                <a:latin typeface="微软雅黑" panose="020B0503020204020204" charset="-122"/>
-              </a:rPr>
-              <a:t>×</a:t>
+                  <a:srgbClr val="91DDD5"/>
+                </a:solidFill>
+                <a:latin typeface="微软雅黑" panose="020B0503020204020204" charset="-122"/>
+              </a:rPr>
+              <a:t>✓</a:t>
             </a:r>
             <a:endParaRPr sz="1500" b="1" i="0">
               <a:solidFill>
@@ -20302,7 +20302,7 @@
                 </a:solidFill>
                 <a:latin typeface="微软雅黑" panose="020B0503020204020204" charset="-122"/>
               </a:rPr>
-              <a:t>CAD 图纸与三维几何特征理解</a:t>
+              <a:t>索引版本化，失败任务可安全重试</a:t>
             </a:r>
             <a:endParaRPr sz="1120" b="0" i="0">
               <a:solidFill>
@@ -20352,11 +20352,11 @@
             <a:r>
               <a:rPr sz="1500" b="1" i="0">
                 <a:solidFill>
-                  <a:srgbClr val="F2B86A"/>
-                </a:solidFill>
-                <a:latin typeface="微软雅黑" panose="020B0503020204020204" charset="-122"/>
-              </a:rPr>
-              <a:t>×</a:t>
+                  <a:srgbClr val="91DDD5"/>
+                </a:solidFill>
+                <a:latin typeface="微软雅黑" panose="020B0503020204020204" charset="-122"/>
+              </a:rPr>
+              <a:t>✓</a:t>
             </a:r>
             <a:endParaRPr sz="1500" b="1" i="0">
               <a:solidFill>
@@ -20410,7 +20410,7 @@
                 </a:solidFill>
                 <a:latin typeface="微软雅黑" panose="020B0503020204020204" charset="-122"/>
               </a:rPr>
-              <a:t>模型预训练或微调</a:t>
+              <a:t>固定版本与配置，保留可复现评估证据</a:t>
             </a:r>
             <a:endParaRPr sz="1120" b="0" i="0">
               <a:solidFill>
@@ -20460,11 +20460,11 @@
             <a:r>
               <a:rPr sz="1500" b="1" i="0">
                 <a:solidFill>
-                  <a:srgbClr val="F2B86A"/>
-                </a:solidFill>
-                <a:latin typeface="微软雅黑" panose="020B0503020204020204" charset="-122"/>
-              </a:rPr>
-              <a:t>×</a:t>
+                  <a:srgbClr val="91DDD5"/>
+                </a:solidFill>
+                <a:latin typeface="微软雅黑" panose="020B0503020204020204" charset="-122"/>
+              </a:rPr>
+              <a:t>✓</a:t>
             </a:r>
             <a:endParaRPr sz="1500" b="1" i="0">
               <a:solidFill>
@@ -20518,7 +20518,7 @@
                 </a:solidFill>
                 <a:latin typeface="微软雅黑" panose="020B0503020204020204" charset="-122"/>
               </a:rPr>
-              <a:t>企业级多租户与复杂业务系统集成</a:t>
+              <a:t>单体服务与单 Worker，支持轻量部署</a:t>
             </a:r>
             <a:endParaRPr sz="1120" b="0" i="0">
               <a:solidFill>
